--- a/DATA5322_HW1_Skentzos_Slides_v2.pptx
+++ b/DATA5322_HW1_Skentzos_Slides_v2.pptx
@@ -1123,10 +1123,7 @@
           <a:bodyPr/>
           <a:lstStyle/>
           <a:p>
-            <a:r>
-              <a:rPr lang="en-US" dirty="0"/>
-              <a:t>The assignment specifically rewards going beyond just predictive metrics, and I included three interpretability analyses. First, the image on the left produces a tree visualization paired side-by-side with a feature importance table, this shows which features drive splits and quantifies their relative contribution. The dominant feature across all encodings is STNDALC: peer disapproval of alcohol. Second, the middle image traces a decision path for a specific test-set observation, I selected a youth predicted as ever-used and walked through every branch split from root to leaf, labeling threshold and direction. This gives a human-readable explanation of one prediction. Third, the image on the left produces the encoding comparison: the same underlying behavior coded as binary, ordinal, and numerical leads to different feature importance profiles. The practical takeaway is that binary encoding gives the cleanest splits but loses the distinction between occasional and chronic use, a distinction that is very important for policy design.</a:t>
-            </a:r>
+            <a:endParaRPr lang="en-US" dirty="0"/>
           </a:p>
         </p:txBody>
       </p:sp>
